--- a/class/cloud_infra_mgmt/10주차_Terraform_IaC심화/01_강의자료/1차시_원격State와TerraformCloud.pptx
+++ b/class/cloud_infra_mgmt/10주차_Terraform_IaC심화/01_강의자료/1차시_원격State와TerraformCloud.pptx
@@ -9414,7 +9414,7 @@
               </a:lnSpc>
             </a:pPr>
             <a:r>
-              <a:rPr sz="1500" b="1">
+              <a:rPr sz="1700" b="1">
                 <a:solidFill>
                   <a:srgbClr val="0D9488"/>
                 </a:solidFill>
@@ -9423,7 +9423,7 @@
               <a:t>●  </a:t>
             </a:r>
             <a:r>
-              <a:rPr sz="1500" b="0">
+              <a:rPr sz="1700" b="0">
                 <a:solidFill>
                   <a:srgbClr val="222733"/>
                 </a:solidFill>
@@ -9439,7 +9439,7 @@
               </a:lnSpc>
             </a:pPr>
             <a:r>
-              <a:rPr sz="1500" b="1">
+              <a:rPr sz="1700" b="1">
                 <a:solidFill>
                   <a:srgbClr val="0D9488"/>
                 </a:solidFill>
@@ -9448,7 +9448,7 @@
               <a:t>●  </a:t>
             </a:r>
             <a:r>
-              <a:rPr sz="1500" b="0">
+              <a:rPr sz="1700" b="0">
                 <a:solidFill>
                   <a:srgbClr val="222733"/>
                 </a:solidFill>
@@ -9464,7 +9464,7 @@
               </a:lnSpc>
             </a:pPr>
             <a:r>
-              <a:rPr sz="1500" b="1">
+              <a:rPr sz="1700" b="1">
                 <a:solidFill>
                   <a:srgbClr val="0D9488"/>
                 </a:solidFill>
@@ -9473,7 +9473,7 @@
               <a:t>●  </a:t>
             </a:r>
             <a:r>
-              <a:rPr sz="1500" b="0">
+              <a:rPr sz="1700" b="0">
                 <a:solidFill>
                   <a:srgbClr val="222733"/>
                 </a:solidFill>

--- a/class/cloud_infra_mgmt/10주차_Terraform_IaC심화/01_강의자료/1차시_원격State와TerraformCloud.pptx
+++ b/class/cloud_infra_mgmt/10주차_Terraform_IaC심화/01_강의자료/1차시_원격State와TerraformCloud.pptx
@@ -5243,7 +5243,7 @@
           <a:p>
             <a:pPr>
               <a:lnSpc>
-                <a:spcPct val="115000"/>
+                <a:spcPct val="149500"/>
               </a:lnSpc>
             </a:pPr>
             <a:r>
@@ -5268,7 +5268,7 @@
           <a:p>
             <a:pPr>
               <a:lnSpc>
-                <a:spcPct val="115000"/>
+                <a:spcPct val="149500"/>
               </a:lnSpc>
             </a:pPr>
             <a:r>
@@ -5293,7 +5293,7 @@
           <a:p>
             <a:pPr>
               <a:lnSpc>
-                <a:spcPct val="115000"/>
+                <a:spcPct val="149500"/>
               </a:lnSpc>
             </a:pPr>
             <a:r>
@@ -5684,7 +5684,7 @@
           <a:p>
             <a:pPr>
               <a:lnSpc>
-                <a:spcPct val="115000"/>
+                <a:spcPct val="149500"/>
               </a:lnSpc>
             </a:pPr>
             <a:r>
@@ -5709,7 +5709,7 @@
           <a:p>
             <a:pPr>
               <a:lnSpc>
-                <a:spcPct val="115000"/>
+                <a:spcPct val="149500"/>
               </a:lnSpc>
             </a:pPr>
             <a:r>
@@ -5734,7 +5734,7 @@
           <a:p>
             <a:pPr>
               <a:lnSpc>
-                <a:spcPct val="115000"/>
+                <a:spcPct val="149500"/>
               </a:lnSpc>
             </a:pPr>
             <a:r>
@@ -6983,16 +6983,104 @@
       </p:sp>
       <p:sp>
         <p:nvSpPr>
-          <p:cNvPr id="7" name="Isosceles Triangle 6"/>
+          <p:cNvPr id="7" name="Rectangle 6"/>
           <p:cNvSpPr/>
           <p:nvPr/>
         </p:nvSpPr>
         <p:spPr>
-          <a:xfrm rot="5400000">
-            <a:off x="3495751" y="1673352"/>
-            <a:ext cx="146304" cy="146304"/>
-          </a:xfrm>
-          <a:prstGeom prst="triangle">
+          <a:xfrm>
+            <a:off x="5096865" y="1730959"/>
+            <a:ext cx="1995220" cy="31089"/>
+          </a:xfrm>
+          <a:prstGeom prst="rect">
+            <a:avLst/>
+          </a:prstGeom>
+          <a:solidFill>
+            <a:srgbClr val="14B8A6"/>
+          </a:solidFill>
+          <a:ln>
+            <a:noFill/>
+          </a:ln>
+          <a:effectLst/>
+        </p:spPr>
+        <p:style>
+          <a:lnRef idx="1">
+            <a:schemeClr val="accent1"/>
+          </a:lnRef>
+          <a:fillRef idx="3">
+            <a:schemeClr val="accent1"/>
+          </a:fillRef>
+          <a:effectRef idx="2">
+            <a:schemeClr val="accent1"/>
+          </a:effectRef>
+          <a:fontRef idx="minor">
+            <a:schemeClr val="lt1"/>
+          </a:fontRef>
+        </p:style>
+        <p:txBody>
+          <a:bodyPr rtlCol="0" anchor="ctr"/>
+          <a:lstStyle/>
+          <a:p>
+            <a:pPr algn="ctr"/>
+          </a:p>
+        </p:txBody>
+      </p:sp>
+      <p:sp>
+        <p:nvSpPr>
+          <p:cNvPr id="8" name="Rectangle 7"/>
+          <p:cNvSpPr/>
+          <p:nvPr/>
+        </p:nvSpPr>
+        <p:spPr>
+          <a:xfrm>
+            <a:off x="7622438" y="1730959"/>
+            <a:ext cx="1995220" cy="31089"/>
+          </a:xfrm>
+          <a:prstGeom prst="rect">
+            <a:avLst/>
+          </a:prstGeom>
+          <a:solidFill>
+            <a:srgbClr val="14B8A6"/>
+          </a:solidFill>
+          <a:ln>
+            <a:noFill/>
+          </a:ln>
+          <a:effectLst/>
+        </p:spPr>
+        <p:style>
+          <a:lnRef idx="1">
+            <a:schemeClr val="accent1"/>
+          </a:lnRef>
+          <a:fillRef idx="3">
+            <a:schemeClr val="accent1"/>
+          </a:fillRef>
+          <a:effectRef idx="2">
+            <a:schemeClr val="accent1"/>
+          </a:effectRef>
+          <a:fontRef idx="minor">
+            <a:schemeClr val="lt1"/>
+          </a:fontRef>
+        </p:style>
+        <p:txBody>
+          <a:bodyPr rtlCol="0" anchor="ctr"/>
+          <a:lstStyle/>
+          <a:p>
+            <a:pPr algn="ctr"/>
+          </a:p>
+        </p:txBody>
+      </p:sp>
+      <p:sp>
+        <p:nvSpPr>
+          <p:cNvPr id="9" name="Oval 8"/>
+          <p:cNvSpPr/>
+          <p:nvPr/>
+        </p:nvSpPr>
+        <p:spPr>
+          <a:xfrm>
+            <a:off x="2040940" y="1481328"/>
+            <a:ext cx="530352" cy="530352"/>
+          </a:xfrm>
+          <a:prstGeom prst="ellipse">
             <a:avLst/>
           </a:prstGeom>
           <a:solidFill>
@@ -7027,227 +7115,7 @@
       </p:sp>
       <p:sp>
         <p:nvSpPr>
-          <p:cNvPr id="8" name="Rectangle 7"/>
-          <p:cNvSpPr/>
-          <p:nvPr/>
-        </p:nvSpPr>
-        <p:spPr>
-          <a:xfrm>
-            <a:off x="5096865" y="1730959"/>
-            <a:ext cx="1995220" cy="31089"/>
-          </a:xfrm>
-          <a:prstGeom prst="rect">
-            <a:avLst/>
-          </a:prstGeom>
-          <a:solidFill>
-            <a:srgbClr val="14B8A6"/>
-          </a:solidFill>
-          <a:ln>
-            <a:noFill/>
-          </a:ln>
-          <a:effectLst/>
-        </p:spPr>
-        <p:style>
-          <a:lnRef idx="1">
-            <a:schemeClr val="accent1"/>
-          </a:lnRef>
-          <a:fillRef idx="3">
-            <a:schemeClr val="accent1"/>
-          </a:fillRef>
-          <a:effectRef idx="2">
-            <a:schemeClr val="accent1"/>
-          </a:effectRef>
-          <a:fontRef idx="minor">
-            <a:schemeClr val="lt1"/>
-          </a:fontRef>
-        </p:style>
-        <p:txBody>
-          <a:bodyPr rtlCol="0" anchor="ctr"/>
-          <a:lstStyle/>
-          <a:p>
-            <a:pPr algn="ctr"/>
-          </a:p>
-        </p:txBody>
-      </p:sp>
-      <p:sp>
-        <p:nvSpPr>
-          <p:cNvPr id="9" name="Isosceles Triangle 8"/>
-          <p:cNvSpPr/>
-          <p:nvPr/>
-        </p:nvSpPr>
-        <p:spPr>
-          <a:xfrm rot="5400000">
-            <a:off x="6021324" y="1673352"/>
-            <a:ext cx="146304" cy="146304"/>
-          </a:xfrm>
-          <a:prstGeom prst="triangle">
-            <a:avLst/>
-          </a:prstGeom>
-          <a:solidFill>
-            <a:srgbClr val="0D9488"/>
-          </a:solidFill>
-          <a:ln>
-            <a:noFill/>
-          </a:ln>
-          <a:effectLst/>
-        </p:spPr>
-        <p:style>
-          <a:lnRef idx="1">
-            <a:schemeClr val="accent1"/>
-          </a:lnRef>
-          <a:fillRef idx="3">
-            <a:schemeClr val="accent1"/>
-          </a:fillRef>
-          <a:effectRef idx="2">
-            <a:schemeClr val="accent1"/>
-          </a:effectRef>
-          <a:fontRef idx="minor">
-            <a:schemeClr val="lt1"/>
-          </a:fontRef>
-        </p:style>
-        <p:txBody>
-          <a:bodyPr rtlCol="0" anchor="ctr"/>
-          <a:lstStyle/>
-          <a:p>
-            <a:pPr algn="ctr"/>
-          </a:p>
-        </p:txBody>
-      </p:sp>
-      <p:sp>
-        <p:nvSpPr>
-          <p:cNvPr id="10" name="Rectangle 9"/>
-          <p:cNvSpPr/>
-          <p:nvPr/>
-        </p:nvSpPr>
-        <p:spPr>
-          <a:xfrm>
-            <a:off x="7622438" y="1730959"/>
-            <a:ext cx="1995220" cy="31089"/>
-          </a:xfrm>
-          <a:prstGeom prst="rect">
-            <a:avLst/>
-          </a:prstGeom>
-          <a:solidFill>
-            <a:srgbClr val="14B8A6"/>
-          </a:solidFill>
-          <a:ln>
-            <a:noFill/>
-          </a:ln>
-          <a:effectLst/>
-        </p:spPr>
-        <p:style>
-          <a:lnRef idx="1">
-            <a:schemeClr val="accent1"/>
-          </a:lnRef>
-          <a:fillRef idx="3">
-            <a:schemeClr val="accent1"/>
-          </a:fillRef>
-          <a:effectRef idx="2">
-            <a:schemeClr val="accent1"/>
-          </a:effectRef>
-          <a:fontRef idx="minor">
-            <a:schemeClr val="lt1"/>
-          </a:fontRef>
-        </p:style>
-        <p:txBody>
-          <a:bodyPr rtlCol="0" anchor="ctr"/>
-          <a:lstStyle/>
-          <a:p>
-            <a:pPr algn="ctr"/>
-          </a:p>
-        </p:txBody>
-      </p:sp>
-      <p:sp>
-        <p:nvSpPr>
-          <p:cNvPr id="11" name="Isosceles Triangle 10"/>
-          <p:cNvSpPr/>
-          <p:nvPr/>
-        </p:nvSpPr>
-        <p:spPr>
-          <a:xfrm rot="5400000">
-            <a:off x="8546896" y="1673352"/>
-            <a:ext cx="146304" cy="146304"/>
-          </a:xfrm>
-          <a:prstGeom prst="triangle">
-            <a:avLst/>
-          </a:prstGeom>
-          <a:solidFill>
-            <a:srgbClr val="0D9488"/>
-          </a:solidFill>
-          <a:ln>
-            <a:noFill/>
-          </a:ln>
-          <a:effectLst/>
-        </p:spPr>
-        <p:style>
-          <a:lnRef idx="1">
-            <a:schemeClr val="accent1"/>
-          </a:lnRef>
-          <a:fillRef idx="3">
-            <a:schemeClr val="accent1"/>
-          </a:fillRef>
-          <a:effectRef idx="2">
-            <a:schemeClr val="accent1"/>
-          </a:effectRef>
-          <a:fontRef idx="minor">
-            <a:schemeClr val="lt1"/>
-          </a:fontRef>
-        </p:style>
-        <p:txBody>
-          <a:bodyPr rtlCol="0" anchor="ctr"/>
-          <a:lstStyle/>
-          <a:p>
-            <a:pPr algn="ctr"/>
-          </a:p>
-        </p:txBody>
-      </p:sp>
-      <p:sp>
-        <p:nvSpPr>
-          <p:cNvPr id="12" name="Oval 11"/>
-          <p:cNvSpPr/>
-          <p:nvPr/>
-        </p:nvSpPr>
-        <p:spPr>
-          <a:xfrm>
-            <a:off x="2040940" y="1481328"/>
-            <a:ext cx="530352" cy="530352"/>
-          </a:xfrm>
-          <a:prstGeom prst="ellipse">
-            <a:avLst/>
-          </a:prstGeom>
-          <a:solidFill>
-            <a:srgbClr val="0D9488"/>
-          </a:solidFill>
-          <a:ln>
-            <a:noFill/>
-          </a:ln>
-          <a:effectLst/>
-        </p:spPr>
-        <p:style>
-          <a:lnRef idx="1">
-            <a:schemeClr val="accent1"/>
-          </a:lnRef>
-          <a:fillRef idx="3">
-            <a:schemeClr val="accent1"/>
-          </a:fillRef>
-          <a:effectRef idx="2">
-            <a:schemeClr val="accent1"/>
-          </a:effectRef>
-          <a:fontRef idx="minor">
-            <a:schemeClr val="lt1"/>
-          </a:fontRef>
-        </p:style>
-        <p:txBody>
-          <a:bodyPr rtlCol="0" anchor="ctr"/>
-          <a:lstStyle/>
-          <a:p>
-            <a:pPr algn="ctr"/>
-          </a:p>
-        </p:txBody>
-      </p:sp>
-      <p:sp>
-        <p:nvSpPr>
-          <p:cNvPr id="13" name="TextBox 12"/>
+          <p:cNvPr id="10" name="TextBox 9"/>
           <p:cNvSpPr txBox="1"/>
           <p:nvPr/>
         </p:nvSpPr>
@@ -7282,7 +7150,7 @@
       </p:sp>
       <p:sp>
         <p:nvSpPr>
-          <p:cNvPr id="14" name="Rounded Rectangle 13"/>
+          <p:cNvPr id="11" name="Rounded Rectangle 10"/>
           <p:cNvSpPr/>
           <p:nvPr/>
         </p:nvSpPr>
@@ -7330,7 +7198,7 @@
       </p:sp>
       <p:sp>
         <p:nvSpPr>
-          <p:cNvPr id="15" name="TextBox 14"/>
+          <p:cNvPr id="12" name="TextBox 11"/>
           <p:cNvSpPr txBox="1"/>
           <p:nvPr/>
         </p:nvSpPr>
@@ -7365,7 +7233,7 @@
       </p:sp>
       <p:sp>
         <p:nvSpPr>
-          <p:cNvPr id="16" name="TextBox 15"/>
+          <p:cNvPr id="13" name="TextBox 12"/>
           <p:cNvSpPr txBox="1"/>
           <p:nvPr/>
         </p:nvSpPr>
@@ -7404,7 +7272,7 @@
       </p:sp>
       <p:sp>
         <p:nvSpPr>
-          <p:cNvPr id="17" name="Oval 16"/>
+          <p:cNvPr id="14" name="Oval 13"/>
           <p:cNvSpPr/>
           <p:nvPr/>
         </p:nvSpPr>
@@ -7448,7 +7316,7 @@
       </p:sp>
       <p:sp>
         <p:nvSpPr>
-          <p:cNvPr id="18" name="TextBox 17"/>
+          <p:cNvPr id="15" name="TextBox 14"/>
           <p:cNvSpPr txBox="1"/>
           <p:nvPr/>
         </p:nvSpPr>
@@ -7483,7 +7351,7 @@
       </p:sp>
       <p:sp>
         <p:nvSpPr>
-          <p:cNvPr id="19" name="Rounded Rectangle 18"/>
+          <p:cNvPr id="16" name="Rounded Rectangle 15"/>
           <p:cNvSpPr/>
           <p:nvPr/>
         </p:nvSpPr>
@@ -7531,7 +7399,7 @@
       </p:sp>
       <p:sp>
         <p:nvSpPr>
-          <p:cNvPr id="20" name="TextBox 19"/>
+          <p:cNvPr id="17" name="TextBox 16"/>
           <p:cNvSpPr txBox="1"/>
           <p:nvPr/>
         </p:nvSpPr>
@@ -7566,7 +7434,7 @@
       </p:sp>
       <p:sp>
         <p:nvSpPr>
-          <p:cNvPr id="21" name="TextBox 20"/>
+          <p:cNvPr id="18" name="TextBox 17"/>
           <p:cNvSpPr txBox="1"/>
           <p:nvPr/>
         </p:nvSpPr>
@@ -7605,7 +7473,7 @@
       </p:sp>
       <p:sp>
         <p:nvSpPr>
-          <p:cNvPr id="22" name="Oval 21"/>
+          <p:cNvPr id="19" name="Oval 18"/>
           <p:cNvSpPr/>
           <p:nvPr/>
         </p:nvSpPr>
@@ -7649,7 +7517,7 @@
       </p:sp>
       <p:sp>
         <p:nvSpPr>
-          <p:cNvPr id="23" name="TextBox 22"/>
+          <p:cNvPr id="20" name="TextBox 19"/>
           <p:cNvSpPr txBox="1"/>
           <p:nvPr/>
         </p:nvSpPr>
@@ -7684,7 +7552,7 @@
       </p:sp>
       <p:sp>
         <p:nvSpPr>
-          <p:cNvPr id="24" name="Rounded Rectangle 23"/>
+          <p:cNvPr id="21" name="Rounded Rectangle 20"/>
           <p:cNvSpPr/>
           <p:nvPr/>
         </p:nvSpPr>
@@ -7732,7 +7600,7 @@
       </p:sp>
       <p:sp>
         <p:nvSpPr>
-          <p:cNvPr id="25" name="TextBox 24"/>
+          <p:cNvPr id="22" name="TextBox 21"/>
           <p:cNvSpPr txBox="1"/>
           <p:nvPr/>
         </p:nvSpPr>
@@ -7767,7 +7635,7 @@
       </p:sp>
       <p:sp>
         <p:nvSpPr>
-          <p:cNvPr id="26" name="TextBox 25"/>
+          <p:cNvPr id="23" name="TextBox 22"/>
           <p:cNvSpPr txBox="1"/>
           <p:nvPr/>
         </p:nvSpPr>
@@ -7806,7 +7674,7 @@
       </p:sp>
       <p:sp>
         <p:nvSpPr>
-          <p:cNvPr id="27" name="Oval 26"/>
+          <p:cNvPr id="24" name="Oval 23"/>
           <p:cNvSpPr/>
           <p:nvPr/>
         </p:nvSpPr>
@@ -7850,7 +7718,7 @@
       </p:sp>
       <p:sp>
         <p:nvSpPr>
-          <p:cNvPr id="28" name="TextBox 27"/>
+          <p:cNvPr id="25" name="TextBox 24"/>
           <p:cNvSpPr txBox="1"/>
           <p:nvPr/>
         </p:nvSpPr>
@@ -7885,7 +7753,7 @@
       </p:sp>
       <p:sp>
         <p:nvSpPr>
-          <p:cNvPr id="29" name="Rounded Rectangle 28"/>
+          <p:cNvPr id="26" name="Rounded Rectangle 25"/>
           <p:cNvSpPr/>
           <p:nvPr/>
         </p:nvSpPr>
@@ -7933,7 +7801,7 @@
       </p:sp>
       <p:sp>
         <p:nvSpPr>
-          <p:cNvPr id="30" name="TextBox 29"/>
+          <p:cNvPr id="27" name="TextBox 26"/>
           <p:cNvSpPr txBox="1"/>
           <p:nvPr/>
         </p:nvSpPr>
@@ -7968,7 +7836,7 @@
       </p:sp>
       <p:sp>
         <p:nvSpPr>
-          <p:cNvPr id="31" name="TextBox 30"/>
+          <p:cNvPr id="28" name="TextBox 27"/>
           <p:cNvSpPr txBox="1"/>
           <p:nvPr/>
         </p:nvSpPr>
@@ -8007,7 +7875,7 @@
       </p:sp>
       <p:sp>
         <p:nvSpPr>
-          <p:cNvPr id="32" name="TextBox 31"/>
+          <p:cNvPr id="29" name="TextBox 28"/>
           <p:cNvSpPr txBox="1"/>
           <p:nvPr/>
         </p:nvSpPr>
@@ -8042,7 +7910,7 @@
       </p:sp>
       <p:sp>
         <p:nvSpPr>
-          <p:cNvPr id="33" name="TextBox 32"/>
+          <p:cNvPr id="30" name="TextBox 29"/>
           <p:cNvSpPr txBox="1"/>
           <p:nvPr/>
         </p:nvSpPr>
@@ -8077,7 +7945,7 @@
       </p:sp>
       <p:sp>
         <p:nvSpPr>
-          <p:cNvPr id="34" name="Rectangle 33"/>
+          <p:cNvPr id="31" name="Rectangle 30"/>
           <p:cNvSpPr/>
           <p:nvPr/>
         </p:nvSpPr>
@@ -8601,7 +8469,7 @@
           <a:p>
             <a:pPr>
               <a:lnSpc>
-                <a:spcPct val="115000"/>
+                <a:spcPct val="149500"/>
               </a:lnSpc>
             </a:pPr>
             <a:r>
@@ -8626,7 +8494,7 @@
           <a:p>
             <a:pPr>
               <a:lnSpc>
-                <a:spcPct val="115000"/>
+                <a:spcPct val="149500"/>
               </a:lnSpc>
             </a:pPr>
             <a:r>
@@ -8651,7 +8519,7 @@
           <a:p>
             <a:pPr>
               <a:lnSpc>
-                <a:spcPct val="115000"/>
+                <a:spcPct val="149500"/>
               </a:lnSpc>
             </a:pPr>
             <a:r>
@@ -8676,7 +8544,7 @@
           <a:p>
             <a:pPr>
               <a:lnSpc>
-                <a:spcPct val="115000"/>
+                <a:spcPct val="149500"/>
               </a:lnSpc>
             </a:pPr>
             <a:r>
@@ -9410,7 +9278,7 @@
           <a:p>
             <a:pPr>
               <a:lnSpc>
-                <a:spcPct val="115000"/>
+                <a:spcPct val="149500"/>
               </a:lnSpc>
             </a:pPr>
             <a:r>
@@ -9435,7 +9303,7 @@
           <a:p>
             <a:pPr>
               <a:lnSpc>
-                <a:spcPct val="115000"/>
+                <a:spcPct val="149500"/>
               </a:lnSpc>
             </a:pPr>
             <a:r>
@@ -9460,7 +9328,7 @@
           <a:p>
             <a:pPr>
               <a:lnSpc>
-                <a:spcPct val="115000"/>
+                <a:spcPct val="149500"/>
               </a:lnSpc>
             </a:pPr>
             <a:r>
@@ -9965,7 +9833,7 @@
           <a:p>
             <a:pPr>
               <a:lnSpc>
-                <a:spcPct val="115000"/>
+                <a:spcPct val="149500"/>
               </a:lnSpc>
             </a:pPr>
             <a:r>
@@ -9990,7 +9858,7 @@
           <a:p>
             <a:pPr>
               <a:lnSpc>
-                <a:spcPct val="115000"/>
+                <a:spcPct val="149500"/>
               </a:lnSpc>
             </a:pPr>
             <a:r>
@@ -10015,7 +9883,7 @@
           <a:p>
             <a:pPr>
               <a:lnSpc>
-                <a:spcPct val="115000"/>
+                <a:spcPct val="149500"/>
               </a:lnSpc>
             </a:pPr>
             <a:r>
@@ -10406,7 +10274,7 @@
           <a:p>
             <a:pPr>
               <a:lnSpc>
-                <a:spcPct val="115000"/>
+                <a:spcPct val="149500"/>
               </a:lnSpc>
             </a:pPr>
             <a:r>
@@ -10431,7 +10299,7 @@
           <a:p>
             <a:pPr>
               <a:lnSpc>
-                <a:spcPct val="115000"/>
+                <a:spcPct val="149500"/>
               </a:lnSpc>
             </a:pPr>
             <a:r>
@@ -10456,7 +10324,7 @@
           <a:p>
             <a:pPr>
               <a:lnSpc>
-                <a:spcPct val="115000"/>
+                <a:spcPct val="149500"/>
               </a:lnSpc>
             </a:pPr>
             <a:r>

--- a/class/cloud_infra_mgmt/10주차_Terraform_IaC심화/01_강의자료/1차시_원격State와TerraformCloud.pptx
+++ b/class/cloud_infra_mgmt/10주차_Terraform_IaC심화/01_강의자료/1차시_원격State와TerraformCloud.pptx
@@ -4879,6 +4879,8 @@
                   <a:srgbClr val="14B8A6"/>
                 </a:solidFill>
                 <a:latin typeface="맑은 고딕"/>
+                <a:ea typeface="맑은 고딕"/>
+                <a:cs typeface="맑은 고딕"/>
               </a:rPr>
               <a:t>클라우드인프라관리  ·  10주차 1차시</a:t>
             </a:r>
@@ -4914,6 +4916,8 @@
                   <a:srgbClr val="FFFFFF"/>
                 </a:solidFill>
                 <a:latin typeface="맑은 고딕"/>
+                <a:ea typeface="맑은 고딕"/>
+                <a:cs typeface="맑은 고딕"/>
               </a:rPr>
               <a:t>원격 State와 Terraform Cloud</a:t>
             </a:r>
@@ -4949,6 +4953,8 @@
                   <a:srgbClr val="C9D3E6"/>
                 </a:solidFill>
                 <a:latin typeface="맑은 고딕"/>
+                <a:ea typeface="맑은 고딕"/>
+                <a:cs typeface="맑은 고딕"/>
               </a:rPr>
               <a:t>State 파일을 안전하게 공유하는 법</a:t>
             </a:r>
@@ -4984,6 +4990,8 @@
                   <a:srgbClr val="FFFFFF"/>
                 </a:solidFill>
                 <a:latin typeface="맑은 고딕"/>
+                <a:ea typeface="맑은 고딕"/>
+                <a:cs typeface="맑은 고딕"/>
               </a:rPr>
               <a:t>영남이공대학교 김지윤교수</a:t>
             </a:r>
@@ -5143,6 +5151,8 @@
                   <a:srgbClr val="14213D"/>
                 </a:solidFill>
                 <a:latin typeface="맑은 고딕"/>
+                <a:ea typeface="맑은 고딕"/>
+                <a:cs typeface="맑은 고딕"/>
               </a:rPr>
               <a:t>03</a:t>
             </a:r>
@@ -5178,6 +5188,8 @@
                   <a:srgbClr val="14B8A6"/>
                 </a:solidFill>
                 <a:latin typeface="맑은 고딕"/>
+                <a:ea typeface="맑은 고딕"/>
+                <a:cs typeface="맑은 고딕"/>
               </a:rPr>
               <a:t>실습 안내</a:t>
             </a:r>
@@ -5213,6 +5225,8 @@
                   <a:srgbClr val="FFFFFF"/>
                 </a:solidFill>
                 <a:latin typeface="맑은 고딕"/>
+                <a:ea typeface="맑은 고딕"/>
+                <a:cs typeface="맑은 고딕"/>
               </a:rPr>
               <a:t>Killercoda — Terraform Cloud 파이프라인 시연 감상</a:t>
             </a:r>
@@ -5252,6 +5266,8 @@
                   <a:srgbClr val="0D9488"/>
                 </a:solidFill>
                 <a:latin typeface="맑은 고딕"/>
+                <a:ea typeface="맑은 고딕"/>
+                <a:cs typeface="맑은 고딕"/>
               </a:rPr>
               <a:t>●  </a:t>
             </a:r>
@@ -5261,6 +5277,8 @@
                   <a:srgbClr val="222733"/>
                 </a:solidFill>
                 <a:latin typeface="맑은 고딕"/>
+                <a:ea typeface="맑은 고딕"/>
+                <a:cs typeface="맑은 고딕"/>
               </a:rPr>
               <a:t>교수자가 미리 준비한 GitHub 템플릿 기반으로 Terraform Cloud 파이프라인이 동작하는 과정을 함께 관찰</a:t>
             </a:r>
@@ -5277,6 +5295,8 @@
                   <a:srgbClr val="0D9488"/>
                 </a:solidFill>
                 <a:latin typeface="맑은 고딕"/>
+                <a:ea typeface="맑은 고딕"/>
+                <a:cs typeface="맑은 고딕"/>
               </a:rPr>
               <a:t>●  </a:t>
             </a:r>
@@ -5286,6 +5306,8 @@
                   <a:srgbClr val="222733"/>
                 </a:solidFill>
                 <a:latin typeface="맑은 고딕"/>
+                <a:ea typeface="맑은 고딕"/>
+                <a:cs typeface="맑은 고딕"/>
               </a:rPr>
               <a:t>GitHub push → Terraform Cloud Runs 탭에 자동으로 plan이 잡히는 흐름을 화면으로 확인</a:t>
             </a:r>
@@ -5302,6 +5324,8 @@
                   <a:srgbClr val="0D9488"/>
                 </a:solidFill>
                 <a:latin typeface="맑은 고딕"/>
+                <a:ea typeface="맑은 고딕"/>
+                <a:cs typeface="맑은 고딕"/>
               </a:rPr>
               <a:t>●  </a:t>
             </a:r>
@@ -5311,6 +5335,8 @@
                   <a:srgbClr val="222733"/>
                 </a:solidFill>
                 <a:latin typeface="맑은 고딕"/>
+                <a:ea typeface="맑은 고딕"/>
+                <a:cs typeface="맑은 고딕"/>
               </a:rPr>
               <a:t>직접 조작하기보다, 다음 차시부터 이어질 실습의 '완성된 그림'을 먼저 보는 시간</a:t>
             </a:r>
@@ -5346,6 +5372,8 @@
                   <a:srgbClr val="5B6373"/>
                 </a:solidFill>
                 <a:latin typeface="맑은 고딕"/>
+                <a:ea typeface="맑은 고딕"/>
+                <a:cs typeface="맑은 고딕"/>
               </a:rPr>
               <a:t>클라우드인프라관리  ·  10주차 1차시</a:t>
             </a:r>
@@ -5381,6 +5409,8 @@
                   <a:srgbClr val="5B6373"/>
                 </a:solidFill>
                 <a:latin typeface="맑은 고딕"/>
+                <a:ea typeface="맑은 고딕"/>
+                <a:cs typeface="맑은 고딕"/>
               </a:rPr>
               <a:t>10 / 13</a:t>
             </a:r>
@@ -5584,6 +5614,8 @@
                   <a:srgbClr val="14213D"/>
                 </a:solidFill>
                 <a:latin typeface="맑은 고딕"/>
+                <a:ea typeface="맑은 고딕"/>
+                <a:cs typeface="맑은 고딕"/>
               </a:rPr>
               <a:t>03</a:t>
             </a:r>
@@ -5619,6 +5651,8 @@
                   <a:srgbClr val="14B8A6"/>
                 </a:solidFill>
                 <a:latin typeface="맑은 고딕"/>
+                <a:ea typeface="맑은 고딕"/>
+                <a:cs typeface="맑은 고딕"/>
               </a:rPr>
               <a:t>실습 안내</a:t>
             </a:r>
@@ -5654,6 +5688,8 @@
                   <a:srgbClr val="FFFFFF"/>
                 </a:solidFill>
                 <a:latin typeface="맑은 고딕"/>
+                <a:ea typeface="맑은 고딕"/>
+                <a:cs typeface="맑은 고딕"/>
               </a:rPr>
               <a:t>VM 안내 — 다음 차시 예고</a:t>
             </a:r>
@@ -5693,6 +5729,8 @@
                   <a:srgbClr val="0D9488"/>
                 </a:solidFill>
                 <a:latin typeface="맑은 고딕"/>
+                <a:ea typeface="맑은 고딕"/>
+                <a:cs typeface="맑은 고딕"/>
               </a:rPr>
               <a:t>●  </a:t>
             </a:r>
@@ -5702,6 +5740,8 @@
                   <a:srgbClr val="222733"/>
                 </a:solidFill>
                 <a:latin typeface="맑은 고딕"/>
+                <a:ea typeface="맑은 고딕"/>
+                <a:cs typeface="맑은 고딕"/>
               </a:rPr>
               <a:t>오늘은 개념 위주였고, 아직 Terraform Cloud 계정을 만들지 않았습니다</a:t>
             </a:r>
@@ -5718,6 +5758,8 @@
                   <a:srgbClr val="0D9488"/>
                 </a:solidFill>
                 <a:latin typeface="맑은 고딕"/>
+                <a:ea typeface="맑은 고딕"/>
+                <a:cs typeface="맑은 고딕"/>
               </a:rPr>
               <a:t>●  </a:t>
             </a:r>
@@ -5727,6 +5769,8 @@
                   <a:srgbClr val="222733"/>
                 </a:solidFill>
                 <a:latin typeface="맑은 고딕"/>
+                <a:ea typeface="맑은 고딕"/>
+                <a:cs typeface="맑은 고딕"/>
               </a:rPr>
               <a:t>다음 2차시 도입부에 계정·조직·워크스페이스 생성을 스크린샷과 함께 단계별로 안내합니다</a:t>
             </a:r>
@@ -5743,6 +5787,8 @@
                   <a:srgbClr val="0D9488"/>
                 </a:solidFill>
                 <a:latin typeface="맑은 고딕"/>
+                <a:ea typeface="맑은 고딕"/>
+                <a:cs typeface="맑은 고딕"/>
               </a:rPr>
               <a:t>●  </a:t>
             </a:r>
@@ -5752,6 +5798,8 @@
                   <a:srgbClr val="222733"/>
                 </a:solidFill>
                 <a:latin typeface="맑은 고딕"/>
+                <a:ea typeface="맑은 고딕"/>
+                <a:cs typeface="맑은 고딕"/>
               </a:rPr>
               <a:t>미리 사용할 이메일 주소만 하나 정해두면 좋습니다(선택)</a:t>
             </a:r>
@@ -5787,6 +5835,8 @@
                   <a:srgbClr val="5B6373"/>
                 </a:solidFill>
                 <a:latin typeface="맑은 고딕"/>
+                <a:ea typeface="맑은 고딕"/>
+                <a:cs typeface="맑은 고딕"/>
               </a:rPr>
               <a:t>클라우드인프라관리  ·  10주차 1차시</a:t>
             </a:r>
@@ -5822,6 +5872,8 @@
                   <a:srgbClr val="5B6373"/>
                 </a:solidFill>
                 <a:latin typeface="맑은 고딕"/>
+                <a:ea typeface="맑은 고딕"/>
+                <a:cs typeface="맑은 고딕"/>
               </a:rPr>
               <a:t>11 / 13</a:t>
             </a:r>
@@ -6007,6 +6059,8 @@
                   <a:srgbClr val="FFFFFF"/>
                 </a:solidFill>
                 <a:latin typeface="맑은 고딕"/>
+                <a:ea typeface="맑은 고딕"/>
+                <a:cs typeface="맑은 고딕"/>
               </a:rPr>
               <a:t>오늘의 정리</a:t>
             </a:r>
@@ -6060,6 +6114,8 @@
                   <a:srgbClr val="14213D"/>
                 </a:solidFill>
                 <a:latin typeface="맑은 고딕"/>
+                <a:ea typeface="맑은 고딕"/>
+                <a:cs typeface="맑은 고딕"/>
               </a:rPr>
               <a:t>1</a:t>
             </a:r>
@@ -6095,6 +6151,8 @@
                   <a:srgbClr val="FFFFFF"/>
                 </a:solidFill>
                 <a:latin typeface="맑은 고딕"/>
+                <a:ea typeface="맑은 고딕"/>
+                <a:cs typeface="맑은 고딕"/>
               </a:rPr>
               <a:t>로컬 State는 협업·보안·실행환경 측면에서 한계가 있다</a:t>
             </a:r>
@@ -6148,6 +6206,8 @@
                   <a:srgbClr val="14213D"/>
                 </a:solidFill>
                 <a:latin typeface="맑은 고딕"/>
+                <a:ea typeface="맑은 고딕"/>
+                <a:cs typeface="맑은 고딕"/>
               </a:rPr>
               <a:t>2</a:t>
             </a:r>
@@ -6183,6 +6243,8 @@
                   <a:srgbClr val="FFFFFF"/>
                 </a:solidFill>
                 <a:latin typeface="맑은 고딕"/>
+                <a:ea typeface="맑은 고딕"/>
+                <a:cs typeface="맑은 고딕"/>
               </a:rPr>
               <a:t>Terraform Cloud는 State를 원격으로 안전하게 저장하고, plan/apply도 원격 서버에서 실행해준다</a:t>
             </a:r>
@@ -6324,6 +6386,8 @@
                   <a:srgbClr val="FFFFFF"/>
                 </a:solidFill>
                 <a:latin typeface="맑은 고딕"/>
+                <a:ea typeface="맑은 고딕"/>
+                <a:cs typeface="맑은 고딕"/>
               </a:rPr>
               <a:t>다음 차시 예고</a:t>
             </a:r>
@@ -6359,6 +6423,8 @@
                   <a:srgbClr val="14B8A6"/>
                 </a:solidFill>
                 <a:latin typeface="맑은 고딕"/>
+                <a:ea typeface="맑은 고딕"/>
+                <a:cs typeface="맑은 고딕"/>
               </a:rPr>
               <a:t>다음 차시 예고 — 10주차 2차시</a:t>
             </a:r>
@@ -6394,6 +6460,8 @@
                   <a:srgbClr val="FFFFFF"/>
                 </a:solidFill>
                 <a:latin typeface="맑은 고딕"/>
+                <a:ea typeface="맑은 고딕"/>
+                <a:cs typeface="맑은 고딕"/>
               </a:rPr>
               <a:t>Terraform Cloud 계정과 조직, 워크스페이스를 직접 만들어봅니다. 단계별 가입 가이드를 준비했습니다.</a:t>
             </a:r>
@@ -6535,6 +6603,8 @@
                   <a:srgbClr val="14B8A6"/>
                 </a:solidFill>
                 <a:latin typeface="맑은 고딕"/>
+                <a:ea typeface="맑은 고딕"/>
+                <a:cs typeface="맑은 고딕"/>
               </a:rPr>
               <a:t>SESSION OVERVIEW</a:t>
             </a:r>
@@ -6570,6 +6640,8 @@
                   <a:srgbClr val="FFFFFF"/>
                 </a:solidFill>
                 <a:latin typeface="맑은 고딕"/>
+                <a:ea typeface="맑은 고딕"/>
+                <a:cs typeface="맑은 고딕"/>
               </a:rPr>
               <a:t>오늘의 학습 목표</a:t>
             </a:r>
@@ -6609,6 +6681,8 @@
                   <a:srgbClr val="222733"/>
                 </a:solidFill>
                 <a:latin typeface="맑은 고딕"/>
+                <a:ea typeface="맑은 고딕"/>
+                <a:cs typeface="맑은 고딕"/>
               </a:rPr>
               <a:t>1.  로컬 State 방식의 문제를 다시 정리하고 원격 State의 필요성을 이해한다</a:t>
             </a:r>
@@ -6625,6 +6699,8 @@
                   <a:srgbClr val="222733"/>
                 </a:solidFill>
                 <a:latin typeface="맑은 고딕"/>
+                <a:ea typeface="맑은 고딕"/>
+                <a:cs typeface="맑은 고딕"/>
               </a:rPr>
               <a:t>2.  Terraform Cloud가 무엇인지, 무엇을 대신 해주는지 이해한다</a:t>
             </a:r>
@@ -6641,6 +6717,8 @@
                   <a:srgbClr val="222733"/>
                 </a:solidFill>
                 <a:latin typeface="맑은 고딕"/>
+                <a:ea typeface="맑은 고딕"/>
+                <a:cs typeface="맑은 고딕"/>
               </a:rPr>
               <a:t>3.  Terraform Cloud의 원격 실행(Remote Execution) 개념을 이해한다</a:t>
             </a:r>
@@ -6676,6 +6754,8 @@
                   <a:srgbClr val="5B6373"/>
                 </a:solidFill>
                 <a:latin typeface="맑은 고딕"/>
+                <a:ea typeface="맑은 고딕"/>
+                <a:cs typeface="맑은 고딕"/>
               </a:rPr>
               <a:t>클라우드인프라관리  ·  10주차 1차시</a:t>
             </a:r>
@@ -6711,6 +6791,8 @@
                   <a:srgbClr val="5B6373"/>
                 </a:solidFill>
                 <a:latin typeface="맑은 고딕"/>
+                <a:ea typeface="맑은 고딕"/>
+                <a:cs typeface="맑은 고딕"/>
               </a:rPr>
               <a:t>02 / 13</a:t>
             </a:r>
@@ -6896,6 +6978,8 @@
                   <a:srgbClr val="14B8A6"/>
                 </a:solidFill>
                 <a:latin typeface="맑은 고딕"/>
+                <a:ea typeface="맑은 고딕"/>
+                <a:cs typeface="맑은 고딕"/>
               </a:rPr>
               <a:t>SESSION OVERVIEW</a:t>
             </a:r>
@@ -6931,6 +7015,8 @@
                   <a:srgbClr val="FFFFFF"/>
                 </a:solidFill>
                 <a:latin typeface="맑은 고딕"/>
+                <a:ea typeface="맑은 고딕"/>
+                <a:cs typeface="맑은 고딕"/>
               </a:rPr>
               <a:t>오늘의 진행 순서</a:t>
             </a:r>
@@ -7142,6 +7228,8 @@
                   <a:srgbClr val="FFFFFF"/>
                 </a:solidFill>
                 <a:latin typeface="맑은 고딕"/>
+                <a:ea typeface="맑은 고딕"/>
+                <a:cs typeface="맑은 고딕"/>
               </a:rPr>
               <a:t>1</a:t>
             </a:r>
@@ -7225,6 +7313,8 @@
                   <a:srgbClr val="14213D"/>
                 </a:solidFill>
                 <a:latin typeface="맑은 고딕"/>
+                <a:ea typeface="맑은 고딕"/>
+                <a:cs typeface="맑은 고딕"/>
               </a:rPr>
               <a:t>개념 설명</a:t>
             </a:r>
@@ -7264,6 +7354,8 @@
                   <a:srgbClr val="222733"/>
                 </a:solidFill>
                 <a:latin typeface="맑은 고딕"/>
+                <a:ea typeface="맑은 고딕"/>
+                <a:cs typeface="맑은 고딕"/>
               </a:rPr>
               <a:t>강의자료 기반 직접 강의</a:t>
             </a:r>
@@ -7343,6 +7435,8 @@
                   <a:srgbClr val="FFFFFF"/>
                 </a:solidFill>
                 <a:latin typeface="맑은 고딕"/>
+                <a:ea typeface="맑은 고딕"/>
+                <a:cs typeface="맑은 고딕"/>
               </a:rPr>
               <a:t>2</a:t>
             </a:r>
@@ -7426,6 +7520,8 @@
                   <a:srgbClr val="14213D"/>
                 </a:solidFill>
                 <a:latin typeface="맑은 고딕"/>
+                <a:ea typeface="맑은 고딕"/>
+                <a:cs typeface="맑은 고딕"/>
               </a:rPr>
               <a:t>Killercoda</a:t>
             </a:r>
@@ -7465,6 +7561,8 @@
                   <a:srgbClr val="222733"/>
                 </a:solidFill>
                 <a:latin typeface="맑은 고딕"/>
+                <a:ea typeface="맑은 고딕"/>
+                <a:cs typeface="맑은 고딕"/>
               </a:rPr>
               <a:t>TFC 파이프라인 시연 감상</a:t>
             </a:r>
@@ -7544,6 +7642,8 @@
                   <a:srgbClr val="FFFFFF"/>
                 </a:solidFill>
                 <a:latin typeface="맑은 고딕"/>
+                <a:ea typeface="맑은 고딕"/>
+                <a:cs typeface="맑은 고딕"/>
               </a:rPr>
               <a:t>3</a:t>
             </a:r>
@@ -7627,6 +7727,8 @@
                   <a:srgbClr val="14213D"/>
                 </a:solidFill>
                 <a:latin typeface="맑은 고딕"/>
+                <a:ea typeface="맑은 고딕"/>
+                <a:cs typeface="맑은 고딕"/>
               </a:rPr>
               <a:t>VM 안내</a:t>
             </a:r>
@@ -7666,6 +7768,8 @@
                   <a:srgbClr val="222733"/>
                 </a:solidFill>
                 <a:latin typeface="맑은 고딕"/>
+                <a:ea typeface="맑은 고딕"/>
+                <a:cs typeface="맑은 고딕"/>
               </a:rPr>
               <a:t>다음 차시 가입 예고</a:t>
             </a:r>
@@ -7745,6 +7849,8 @@
                   <a:srgbClr val="FFFFFF"/>
                 </a:solidFill>
                 <a:latin typeface="맑은 고딕"/>
+                <a:ea typeface="맑은 고딕"/>
+                <a:cs typeface="맑은 고딕"/>
               </a:rPr>
               <a:t>4</a:t>
             </a:r>
@@ -7828,6 +7934,8 @@
                   <a:srgbClr val="14213D"/>
                 </a:solidFill>
                 <a:latin typeface="맑은 고딕"/>
+                <a:ea typeface="맑은 고딕"/>
+                <a:cs typeface="맑은 고딕"/>
               </a:rPr>
               <a:t>결과 제출</a:t>
             </a:r>
@@ -7867,6 +7975,8 @@
                   <a:srgbClr val="222733"/>
                 </a:solidFill>
                 <a:latin typeface="맑은 고딕"/>
+                <a:ea typeface="맑은 고딕"/>
+                <a:cs typeface="맑은 고딕"/>
               </a:rPr>
               <a:t>체크리스트 제출</a:t>
             </a:r>
@@ -7902,6 +8012,8 @@
                   <a:srgbClr val="5B6373"/>
                 </a:solidFill>
                 <a:latin typeface="맑은 고딕"/>
+                <a:ea typeface="맑은 고딕"/>
+                <a:cs typeface="맑은 고딕"/>
               </a:rPr>
               <a:t>클라우드인프라관리  ·  10주차 1차시</a:t>
             </a:r>
@@ -7937,6 +8049,8 @@
                   <a:srgbClr val="5B6373"/>
                 </a:solidFill>
                 <a:latin typeface="맑은 고딕"/>
+                <a:ea typeface="맑은 고딕"/>
+                <a:cs typeface="맑은 고딕"/>
               </a:rPr>
               <a:t>03 / 13</a:t>
             </a:r>
@@ -8140,6 +8254,8 @@
                   <a:srgbClr val="14213D"/>
                 </a:solidFill>
                 <a:latin typeface="맑은 고딕"/>
+                <a:ea typeface="맑은 고딕"/>
+                <a:cs typeface="맑은 고딕"/>
               </a:rPr>
               <a:t>PART 01</a:t>
             </a:r>
@@ -8175,6 +8291,8 @@
                   <a:srgbClr val="FFFFFF"/>
                 </a:solidFill>
                 <a:latin typeface="맑은 고딕"/>
+                <a:ea typeface="맑은 고딕"/>
+                <a:cs typeface="맑은 고딕"/>
               </a:rPr>
               <a:t>로컬 State, 다시 보는 문제</a:t>
             </a:r>
@@ -8210,6 +8328,8 @@
                   <a:srgbClr val="C9D3E6"/>
                 </a:solidFill>
                 <a:latin typeface="맑은 고딕"/>
+                <a:ea typeface="맑은 고딕"/>
+                <a:cs typeface="맑은 고딕"/>
               </a:rPr>
               <a:t>9주차 마지막 예고를 이어서</a:t>
             </a:r>
@@ -8369,6 +8489,8 @@
                   <a:srgbClr val="14213D"/>
                 </a:solidFill>
                 <a:latin typeface="맑은 고딕"/>
+                <a:ea typeface="맑은 고딕"/>
+                <a:cs typeface="맑은 고딕"/>
               </a:rPr>
               <a:t>01</a:t>
             </a:r>
@@ -8404,6 +8526,8 @@
                   <a:srgbClr val="14B8A6"/>
                 </a:solidFill>
                 <a:latin typeface="맑은 고딕"/>
+                <a:ea typeface="맑은 고딕"/>
+                <a:cs typeface="맑은 고딕"/>
               </a:rPr>
               <a:t>PART 1 · 로컬 State의 문제</a:t>
             </a:r>
@@ -8439,6 +8563,8 @@
                   <a:srgbClr val="FFFFFF"/>
                 </a:solidFill>
                 <a:latin typeface="맑은 고딕"/>
+                <a:ea typeface="맑은 고딕"/>
+                <a:cs typeface="맑은 고딕"/>
               </a:rPr>
               <a:t>혼자 쓸 땐 몰랐던 문제들</a:t>
             </a:r>
@@ -8478,6 +8604,8 @@
                   <a:srgbClr val="0D9488"/>
                 </a:solidFill>
                 <a:latin typeface="맑은 고딕"/>
+                <a:ea typeface="맑은 고딕"/>
+                <a:cs typeface="맑은 고딕"/>
               </a:rPr>
               <a:t>●  </a:t>
             </a:r>
@@ -8487,6 +8615,8 @@
                   <a:srgbClr val="222733"/>
                 </a:solidFill>
                 <a:latin typeface="맑은 고딕"/>
+                <a:ea typeface="맑은 고딕"/>
+                <a:cs typeface="맑은 고딕"/>
               </a:rPr>
               <a:t>지난 주 배운 대로, State 파일은 지금까지 전부 내 VM 로컬 디스크에만 있었음</a:t>
             </a:r>
@@ -8503,6 +8633,8 @@
                   <a:srgbClr val="0D9488"/>
                 </a:solidFill>
                 <a:latin typeface="맑은 고딕"/>
+                <a:ea typeface="맑은 고딕"/>
+                <a:cs typeface="맑은 고딕"/>
               </a:rPr>
               <a:t>●  </a:t>
             </a:r>
@@ -8512,6 +8644,8 @@
                   <a:srgbClr val="222733"/>
                 </a:solidFill>
                 <a:latin typeface="맑은 고딕"/>
+                <a:ea typeface="맑은 고딕"/>
+                <a:cs typeface="맑은 고딕"/>
               </a:rPr>
               <a:t>협업 문제 — 여러 사람이 같은 인프라를 다루면 서로 다른 State를 갖게 되어 충돌</a:t>
             </a:r>
@@ -8528,6 +8662,8 @@
                   <a:srgbClr val="0D9488"/>
                 </a:solidFill>
                 <a:latin typeface="맑은 고딕"/>
+                <a:ea typeface="맑은 고딕"/>
+                <a:cs typeface="맑은 고딕"/>
               </a:rPr>
               <a:t>●  </a:t>
             </a:r>
@@ -8537,6 +8673,8 @@
                   <a:srgbClr val="222733"/>
                 </a:solidFill>
                 <a:latin typeface="맑은 고딕"/>
+                <a:ea typeface="맑은 고딕"/>
+                <a:cs typeface="맑은 고딕"/>
               </a:rPr>
               <a:t>보안 문제 — State 안에 비밀번호 등 민감정보가 평문 포함될 수 있음</a:t>
             </a:r>
@@ -8553,6 +8691,8 @@
                   <a:srgbClr val="0D9488"/>
                 </a:solidFill>
                 <a:latin typeface="맑은 고딕"/>
+                <a:ea typeface="맑은 고딕"/>
+                <a:cs typeface="맑은 고딕"/>
               </a:rPr>
               <a:t>●  </a:t>
             </a:r>
@@ -8562,6 +8702,8 @@
                   <a:srgbClr val="222733"/>
                 </a:solidFill>
                 <a:latin typeface="맑은 고딕"/>
+                <a:ea typeface="맑은 고딕"/>
+                <a:cs typeface="맑은 고딕"/>
               </a:rPr>
               <a:t>실행 환경 문제 — 내 VM이 꺼지면 아무도 apply를 실행할 수 없음</a:t>
             </a:r>
@@ -8641,6 +8783,8 @@
                   <a:srgbClr val="FFFFFF"/>
                 </a:solidFill>
                 <a:latin typeface="맑은 고딕"/>
+                <a:ea typeface="맑은 고딕"/>
+                <a:cs typeface="맑은 고딕"/>
               </a:rPr>
               <a:t>🤔 그럼 State를 어딘가 '공용 장소'에 두면 어떨까?</a:t>
             </a:r>
@@ -8676,6 +8820,8 @@
                   <a:srgbClr val="FFFFFF"/>
                 </a:solidFill>
                 <a:latin typeface="맑은 고딕"/>
+                <a:ea typeface="맑은 고딕"/>
+                <a:cs typeface="맑은 고딕"/>
               </a:rPr>
               <a:t>바로 이 아이디어가 원격 백엔드(Remote Backend)입니다</a:t>
             </a:r>
@@ -8711,6 +8857,8 @@
                   <a:srgbClr val="5B6373"/>
                 </a:solidFill>
                 <a:latin typeface="맑은 고딕"/>
+                <a:ea typeface="맑은 고딕"/>
+                <a:cs typeface="맑은 고딕"/>
               </a:rPr>
               <a:t>클라우드인프라관리  ·  10주차 1차시</a:t>
             </a:r>
@@ -8746,6 +8894,8 @@
                   <a:srgbClr val="5B6373"/>
                 </a:solidFill>
                 <a:latin typeface="맑은 고딕"/>
+                <a:ea typeface="맑은 고딕"/>
+                <a:cs typeface="맑은 고딕"/>
               </a:rPr>
               <a:t>05 / 13</a:t>
             </a:r>
@@ -8949,6 +9099,8 @@
                   <a:srgbClr val="14213D"/>
                 </a:solidFill>
                 <a:latin typeface="맑은 고딕"/>
+                <a:ea typeface="맑은 고딕"/>
+                <a:cs typeface="맑은 고딕"/>
               </a:rPr>
               <a:t>PART 02</a:t>
             </a:r>
@@ -8984,6 +9136,8 @@
                   <a:srgbClr val="FFFFFF"/>
                 </a:solidFill>
                 <a:latin typeface="맑은 고딕"/>
+                <a:ea typeface="맑은 고딕"/>
+                <a:cs typeface="맑은 고딕"/>
               </a:rPr>
               <a:t>Terraform Cloud</a:t>
             </a:r>
@@ -9019,6 +9173,8 @@
                   <a:srgbClr val="C9D3E6"/>
                 </a:solidFill>
                 <a:latin typeface="맑은 고딕"/>
+                <a:ea typeface="맑은 고딕"/>
+                <a:cs typeface="맑은 고딕"/>
               </a:rPr>
               <a:t>HashiCorp가 제공하는 원격 실행 서비스</a:t>
             </a:r>
@@ -9178,6 +9334,8 @@
                   <a:srgbClr val="14213D"/>
                 </a:solidFill>
                 <a:latin typeface="맑은 고딕"/>
+                <a:ea typeface="맑은 고딕"/>
+                <a:cs typeface="맑은 고딕"/>
               </a:rPr>
               <a:t>02</a:t>
             </a:r>
@@ -9213,6 +9371,8 @@
                   <a:srgbClr val="14B8A6"/>
                 </a:solidFill>
                 <a:latin typeface="맑은 고딕"/>
+                <a:ea typeface="맑은 고딕"/>
+                <a:cs typeface="맑은 고딕"/>
               </a:rPr>
               <a:t>PART 2 · Terraform Cloud</a:t>
             </a:r>
@@ -9248,6 +9408,8 @@
                   <a:srgbClr val="FFFFFF"/>
                 </a:solidFill>
                 <a:latin typeface="맑은 고딕"/>
+                <a:ea typeface="맑은 고딕"/>
+                <a:cs typeface="맑은 고딕"/>
               </a:rPr>
               <a:t>Terraform Cloud가 대신 해주는 일</a:t>
             </a:r>
@@ -9287,6 +9449,8 @@
                   <a:srgbClr val="0D9488"/>
                 </a:solidFill>
                 <a:latin typeface="맑은 고딕"/>
+                <a:ea typeface="맑은 고딕"/>
+                <a:cs typeface="맑은 고딕"/>
               </a:rPr>
               <a:t>●  </a:t>
             </a:r>
@@ -9296,6 +9460,8 @@
                   <a:srgbClr val="222733"/>
                 </a:solidFill>
                 <a:latin typeface="맑은 고딕"/>
+                <a:ea typeface="맑은 고딕"/>
+                <a:cs typeface="맑은 고딕"/>
               </a:rPr>
               <a:t>State 저장 — 여러 사람이 공유하는 안전한 원격 저장소에 State 보관</a:t>
             </a:r>
@@ -9312,6 +9478,8 @@
                   <a:srgbClr val="0D9488"/>
                 </a:solidFill>
                 <a:latin typeface="맑은 고딕"/>
+                <a:ea typeface="맑은 고딕"/>
+                <a:cs typeface="맑은 고딕"/>
               </a:rPr>
               <a:t>●  </a:t>
             </a:r>
@@ -9321,6 +9489,8 @@
                   <a:srgbClr val="222733"/>
                 </a:solidFill>
                 <a:latin typeface="맑은 고딕"/>
+                <a:ea typeface="맑은 고딕"/>
+                <a:cs typeface="맑은 고딕"/>
               </a:rPr>
               <a:t>원격 실행 — plan/apply를 내 VM이 아니라 Terraform Cloud 서버에서 실행</a:t>
             </a:r>
@@ -9337,6 +9507,8 @@
                   <a:srgbClr val="0D9488"/>
                 </a:solidFill>
                 <a:latin typeface="맑은 고딕"/>
+                <a:ea typeface="맑은 고딕"/>
+                <a:cs typeface="맑은 고딕"/>
               </a:rPr>
               <a:t>●  </a:t>
             </a:r>
@@ -9346,6 +9518,8 @@
                   <a:srgbClr val="222733"/>
                 </a:solidFill>
                 <a:latin typeface="맑은 고딕"/>
+                <a:ea typeface="맑은 고딕"/>
+                <a:cs typeface="맑은 고딕"/>
               </a:rPr>
               <a:t>실행 이력 — 누가 언제 무엇을 바꿨는지 Runs 탭에서 전부 기록·조회 가능</a:t>
             </a:r>
@@ -9381,6 +9555,8 @@
                   <a:srgbClr val="14213D"/>
                 </a:solidFill>
                 <a:latin typeface="맑은 고딕"/>
+                <a:ea typeface="맑은 고딕"/>
+                <a:cs typeface="맑은 고딕"/>
               </a:rPr>
               <a:t>Terraform Cloud 역할</a:t>
             </a:r>
@@ -9460,6 +9636,8 @@
                   <a:srgbClr val="FFFFFF"/>
                 </a:solidFill>
                 <a:latin typeface="맑은 고딕"/>
+                <a:ea typeface="맑은 고딕"/>
+                <a:cs typeface="맑은 고딕"/>
               </a:rPr>
               <a:t>내 VM(코드 작성) → Terraform Cloud(State 저장+원격 실행) → 실제 인프라</a:t>
             </a:r>
@@ -9495,6 +9673,8 @@
                   <a:srgbClr val="5B6373"/>
                 </a:solidFill>
                 <a:latin typeface="맑은 고딕"/>
+                <a:ea typeface="맑은 고딕"/>
+                <a:cs typeface="맑은 고딕"/>
               </a:rPr>
               <a:t>클라우드인프라관리  ·  10주차 1차시</a:t>
             </a:r>
@@ -9530,6 +9710,8 @@
                   <a:srgbClr val="5B6373"/>
                 </a:solidFill>
                 <a:latin typeface="맑은 고딕"/>
+                <a:ea typeface="맑은 고딕"/>
+                <a:cs typeface="맑은 고딕"/>
               </a:rPr>
               <a:t>07 / 13</a:t>
             </a:r>
@@ -9733,6 +9915,8 @@
                   <a:srgbClr val="14213D"/>
                 </a:solidFill>
                 <a:latin typeface="맑은 고딕"/>
+                <a:ea typeface="맑은 고딕"/>
+                <a:cs typeface="맑은 고딕"/>
               </a:rPr>
               <a:t>02</a:t>
             </a:r>
@@ -9768,6 +9952,8 @@
                   <a:srgbClr val="14B8A6"/>
                 </a:solidFill>
                 <a:latin typeface="맑은 고딕"/>
+                <a:ea typeface="맑은 고딕"/>
+                <a:cs typeface="맑은 고딕"/>
               </a:rPr>
               <a:t>PART 2 · Terraform Cloud</a:t>
             </a:r>
@@ -9803,6 +9989,8 @@
                   <a:srgbClr val="FFFFFF"/>
                 </a:solidFill>
                 <a:latin typeface="맑은 고딕"/>
+                <a:ea typeface="맑은 고딕"/>
+                <a:cs typeface="맑은 고딕"/>
               </a:rPr>
               <a:t>원격 실행(Remote Execution)이란</a:t>
             </a:r>
@@ -9842,6 +10030,8 @@
                   <a:srgbClr val="0D9488"/>
                 </a:solidFill>
                 <a:latin typeface="맑은 고딕"/>
+                <a:ea typeface="맑은 고딕"/>
+                <a:cs typeface="맑은 고딕"/>
               </a:rPr>
               <a:t>●  </a:t>
             </a:r>
@@ -9851,6 +10041,8 @@
                   <a:srgbClr val="222733"/>
                 </a:solidFill>
                 <a:latin typeface="맑은 고딕"/>
+                <a:ea typeface="맑은 고딕"/>
+                <a:cs typeface="맑은 고딕"/>
               </a:rPr>
               <a:t>terraform apply를 실행해도, 실제 plan/apply 연산은 Terraform Cloud의 서버에서 처리됨</a:t>
             </a:r>
@@ -9867,6 +10059,8 @@
                   <a:srgbClr val="0D9488"/>
                 </a:solidFill>
                 <a:latin typeface="맑은 고딕"/>
+                <a:ea typeface="맑은 고딕"/>
+                <a:cs typeface="맑은 고딕"/>
               </a:rPr>
               <a:t>●  </a:t>
             </a:r>
@@ -9876,6 +10070,8 @@
                   <a:srgbClr val="222733"/>
                 </a:solidFill>
                 <a:latin typeface="맑은 고딕"/>
+                <a:ea typeface="맑은 고딕"/>
+                <a:cs typeface="맑은 고딕"/>
               </a:rPr>
               <a:t>내 VM은 코드를 Terraform Cloud에 전달하는 역할만 하고, 실행 결과를 돌려받음</a:t>
             </a:r>
@@ -9892,6 +10088,8 @@
                   <a:srgbClr val="0D9488"/>
                 </a:solidFill>
                 <a:latin typeface="맑은 고딕"/>
+                <a:ea typeface="맑은 고딕"/>
+                <a:cs typeface="맑은 고딕"/>
               </a:rPr>
               <a:t>●  </a:t>
             </a:r>
@@ -9901,6 +10099,8 @@
                   <a:srgbClr val="222733"/>
                 </a:solidFill>
                 <a:latin typeface="맑은 고딕"/>
+                <a:ea typeface="맑은 고딕"/>
+                <a:cs typeface="맑은 고딕"/>
               </a:rPr>
               <a:t>여러 명이 같은 워크스페이스에 접근해도 항상 하나의 State만 존재 — 충돌 없음</a:t>
             </a:r>
@@ -9936,6 +10136,8 @@
                   <a:srgbClr val="5B6373"/>
                 </a:solidFill>
                 <a:latin typeface="맑은 고딕"/>
+                <a:ea typeface="맑은 고딕"/>
+                <a:cs typeface="맑은 고딕"/>
               </a:rPr>
               <a:t>클라우드인프라관리  ·  10주차 1차시</a:t>
             </a:r>
@@ -9971,6 +10173,8 @@
                   <a:srgbClr val="5B6373"/>
                 </a:solidFill>
                 <a:latin typeface="맑은 고딕"/>
+                <a:ea typeface="맑은 고딕"/>
+                <a:cs typeface="맑은 고딕"/>
               </a:rPr>
               <a:t>08 / 13</a:t>
             </a:r>
@@ -10174,6 +10378,8 @@
                   <a:srgbClr val="14213D"/>
                 </a:solidFill>
                 <a:latin typeface="맑은 고딕"/>
+                <a:ea typeface="맑은 고딕"/>
+                <a:cs typeface="맑은 고딕"/>
               </a:rPr>
               <a:t>02</a:t>
             </a:r>
@@ -10209,6 +10415,8 @@
                   <a:srgbClr val="14B8A6"/>
                 </a:solidFill>
                 <a:latin typeface="맑은 고딕"/>
+                <a:ea typeface="맑은 고딕"/>
+                <a:cs typeface="맑은 고딕"/>
               </a:rPr>
               <a:t>PART 2 · Terraform Cloud</a:t>
             </a:r>
@@ -10244,6 +10452,8 @@
                   <a:srgbClr val="FFFFFF"/>
                 </a:solidFill>
                 <a:latin typeface="맑은 고딕"/>
+                <a:ea typeface="맑은 고딕"/>
+                <a:cs typeface="맑은 고딕"/>
               </a:rPr>
               <a:t>⚠ 오늘 꼭 기억해야 할 것</a:t>
             </a:r>
@@ -10283,6 +10493,8 @@
                   <a:srgbClr val="0D9488"/>
                 </a:solidFill>
                 <a:latin typeface="맑은 고딕"/>
+                <a:ea typeface="맑은 고딕"/>
+                <a:cs typeface="맑은 고딕"/>
               </a:rPr>
               <a:t>●  </a:t>
             </a:r>
@@ -10292,6 +10504,8 @@
                   <a:srgbClr val="222733"/>
                 </a:solidFill>
                 <a:latin typeface="맑은 고딕"/>
+                <a:ea typeface="맑은 고딕"/>
+                <a:cs typeface="맑은 고딕"/>
               </a:rPr>
               <a:t>원격 실행은 Terraform Cloud의 서버에서 이뤄지므로, 내 VM의 로컬 자원(Docker 등)에 접근할 수 없음</a:t>
             </a:r>
@@ -10308,6 +10522,8 @@
                   <a:srgbClr val="0D9488"/>
                 </a:solidFill>
                 <a:latin typeface="맑은 고딕"/>
+                <a:ea typeface="맑은 고딕"/>
+                <a:cs typeface="맑은 고딕"/>
               </a:rPr>
               <a:t>●  </a:t>
             </a:r>
@@ -10317,6 +10533,8 @@
                   <a:srgbClr val="222733"/>
                 </a:solidFill>
                 <a:latin typeface="맑은 고딕"/>
+                <a:ea typeface="맑은 고딕"/>
+                <a:cs typeface="맑은 고딕"/>
               </a:rPr>
               <a:t>그래서 10주차 실습은 9주차의 docker Provider 예제를 그대로 쓸 수 없음</a:t>
             </a:r>
@@ -10333,6 +10551,8 @@
                   <a:srgbClr val="0D9488"/>
                 </a:solidFill>
                 <a:latin typeface="맑은 고딕"/>
+                <a:ea typeface="맑은 고딕"/>
+                <a:cs typeface="맑은 고딕"/>
               </a:rPr>
               <a:t>●  </a:t>
             </a:r>
@@ -10342,6 +10562,8 @@
                   <a:srgbClr val="222733"/>
                 </a:solidFill>
                 <a:latin typeface="맑은 고딕"/>
+                <a:ea typeface="맑은 고딕"/>
+                <a:cs typeface="맑은 고딕"/>
               </a:rPr>
               <a:t>로컬 인프라에 의존하지 않는 리소스(random_pet)로 원격 실행의 원리만 확인할 예정</a:t>
             </a:r>
@@ -10421,6 +10643,8 @@
                   <a:srgbClr val="FFFFFF"/>
                 </a:solidFill>
                 <a:latin typeface="맑은 고딕"/>
+                <a:ea typeface="맑은 고딕"/>
+                <a:cs typeface="맑은 고딕"/>
               </a:rPr>
               <a:t>📌 검증된 포인트</a:t>
             </a:r>
@@ -10456,6 +10680,8 @@
                   <a:srgbClr val="FFFFFF"/>
                 </a:solidFill>
                 <a:latin typeface="맑은 고딕"/>
+                <a:ea typeface="맑은 고딕"/>
+                <a:cs typeface="맑은 고딕"/>
               </a:rPr>
               <a:t>실제로 docker_container를 원격 실행하면 "Cannot connect to the Docker daemon" 오류가 납니다</a:t>
             </a:r>
@@ -10491,6 +10717,8 @@
                   <a:srgbClr val="5B6373"/>
                 </a:solidFill>
                 <a:latin typeface="맑은 고딕"/>
+                <a:ea typeface="맑은 고딕"/>
+                <a:cs typeface="맑은 고딕"/>
               </a:rPr>
               <a:t>클라우드인프라관리  ·  10주차 1차시</a:t>
             </a:r>
@@ -10526,6 +10754,8 @@
                   <a:srgbClr val="5B6373"/>
                 </a:solidFill>
                 <a:latin typeface="맑은 고딕"/>
+                <a:ea typeface="맑은 고딕"/>
+                <a:cs typeface="맑은 고딕"/>
               </a:rPr>
               <a:t>09 / 13</a:t>
             </a:r>
